--- a/pptx-asset-library/decks/01_tables/TBL_bulk_borderless_v1.pptx
+++ b/pptx-asset-library/decks/01_tables/TBL_bulk_borderless_v1.pptx
@@ -3189,7 +3189,7 @@
           <a:graphicData uri="http://schemas.openxmlformats.org/drawingml/2006/table">
             <a:tbl>
               <a:tblPr>
-                <a:tableStyleId>{2D5ABB26-0587-4C30-8999-92F81FD0307C}</a:tableStyleId>
+                <a:tableStyleId>{5C22544A-7EE6-4342-B048-85BDC9FD1C3A}</a:tableStyleId>
               </a:tblPr>
               <a:tblGrid>
                 <a:gridCol w="2194560"/>
@@ -3934,7 +3934,7 @@
           <a:graphicData uri="http://schemas.openxmlformats.org/drawingml/2006/table">
             <a:tbl>
               <a:tblPr>
-                <a:tableStyleId>{2D5ABB26-0587-4C30-8999-92F81FD0307C}</a:tableStyleId>
+                <a:tableStyleId>{5C22544A-7EE6-4342-B048-85BDC9FD1C3A}</a:tableStyleId>
               </a:tblPr>
               <a:tblGrid>
                 <a:gridCol w="2194560"/>
@@ -4798,7 +4798,7 @@
           <a:graphicData uri="http://schemas.openxmlformats.org/drawingml/2006/table">
             <a:tbl>
               <a:tblPr>
-                <a:tableStyleId>{2D5ABB26-0587-4C30-8999-92F81FD0307C}</a:tableStyleId>
+                <a:tableStyleId>{5C22544A-7EE6-4342-B048-85BDC9FD1C3A}</a:tableStyleId>
               </a:tblPr>
               <a:tblGrid>
                 <a:gridCol w="2194560"/>
@@ -5895,7 +5895,7 @@
           <a:graphicData uri="http://schemas.openxmlformats.org/drawingml/2006/table">
             <a:tbl>
               <a:tblPr>
-                <a:tableStyleId>{2D5ABB26-0587-4C30-8999-92F81FD0307C}</a:tableStyleId>
+                <a:tableStyleId>{5C22544A-7EE6-4342-B048-85BDC9FD1C3A}</a:tableStyleId>
               </a:tblPr>
               <a:tblGrid>
                 <a:gridCol w="2194560"/>
@@ -7225,7 +7225,7 @@
           <a:graphicData uri="http://schemas.openxmlformats.org/drawingml/2006/table">
             <a:tbl>
               <a:tblPr>
-                <a:tableStyleId>{2D5ABB26-0587-4C30-8999-92F81FD0307C}</a:tableStyleId>
+                <a:tableStyleId>{5C22544A-7EE6-4342-B048-85BDC9FD1C3A}</a:tableStyleId>
               </a:tblPr>
               <a:tblGrid>
                 <a:gridCol w="2194560"/>
@@ -8164,7 +8164,7 @@
           <a:graphicData uri="http://schemas.openxmlformats.org/drawingml/2006/table">
             <a:tbl>
               <a:tblPr>
-                <a:tableStyleId>{2D5ABB26-0587-4C30-8999-92F81FD0307C}</a:tableStyleId>
+                <a:tableStyleId>{5C22544A-7EE6-4342-B048-85BDC9FD1C3A}</a:tableStyleId>
               </a:tblPr>
               <a:tblGrid>
                 <a:gridCol w="2194560"/>
@@ -9297,7 +9297,7 @@
           <a:graphicData uri="http://schemas.openxmlformats.org/drawingml/2006/table">
             <a:tbl>
               <a:tblPr>
-                <a:tableStyleId>{2D5ABB26-0587-4C30-8999-92F81FD0307C}</a:tableStyleId>
+                <a:tableStyleId>{5C22544A-7EE6-4342-B048-85BDC9FD1C3A}</a:tableStyleId>
               </a:tblPr>
               <a:tblGrid>
                 <a:gridCol w="2194560"/>
@@ -10161,7 +10161,7 @@
           <a:graphicData uri="http://schemas.openxmlformats.org/drawingml/2006/table">
             <a:tbl>
               <a:tblPr>
-                <a:tableStyleId>{2D5ABB26-0587-4C30-8999-92F81FD0307C}</a:tableStyleId>
+                <a:tableStyleId>{5C22544A-7EE6-4342-B048-85BDC9FD1C3A}</a:tableStyleId>
               </a:tblPr>
               <a:tblGrid>
                 <a:gridCol w="2194560"/>
@@ -11258,7 +11258,7 @@
           <a:graphicData uri="http://schemas.openxmlformats.org/drawingml/2006/table">
             <a:tbl>
               <a:tblPr>
-                <a:tableStyleId>{2D5ABB26-0587-4C30-8999-92F81FD0307C}</a:tableStyleId>
+                <a:tableStyleId>{5C22544A-7EE6-4342-B048-85BDC9FD1C3A}</a:tableStyleId>
               </a:tblPr>
               <a:tblGrid>
                 <a:gridCol w="2194560"/>
@@ -12588,7 +12588,7 @@
           <a:graphicData uri="http://schemas.openxmlformats.org/drawingml/2006/table">
             <a:tbl>
               <a:tblPr>
-                <a:tableStyleId>{2D5ABB26-0587-4C30-8999-92F81FD0307C}</a:tableStyleId>
+                <a:tableStyleId>{5C22544A-7EE6-4342-B048-85BDC9FD1C3A}</a:tableStyleId>
               </a:tblPr>
               <a:tblGrid>
                 <a:gridCol w="2194560"/>
@@ -13333,7 +13333,7 @@
           <a:graphicData uri="http://schemas.openxmlformats.org/drawingml/2006/table">
             <a:tbl>
               <a:tblPr>
-                <a:tableStyleId>{2D5ABB26-0587-4C30-8999-92F81FD0307C}</a:tableStyleId>
+                <a:tableStyleId>{5C22544A-7EE6-4342-B048-85BDC9FD1C3A}</a:tableStyleId>
               </a:tblPr>
               <a:tblGrid>
                 <a:gridCol w="2194560"/>
@@ -14272,7 +14272,7 @@
           <a:graphicData uri="http://schemas.openxmlformats.org/drawingml/2006/table">
             <a:tbl>
               <a:tblPr>
-                <a:tableStyleId>{2D5ABB26-0587-4C30-8999-92F81FD0307C}</a:tableStyleId>
+                <a:tableStyleId>{5C22544A-7EE6-4342-B048-85BDC9FD1C3A}</a:tableStyleId>
               </a:tblPr>
               <a:tblGrid>
                 <a:gridCol w="2194560"/>
